--- a/index/designs/y7-l12/l8-cumulative-review/l8-cumulative-review.pptx
+++ b/index/designs/y7-l12/l8-cumulative-review/l8-cumulative-review.pptx
@@ -2564,9 +2564,6 @@
               </a:rPr>
               <a:t>Word order: </a:t>
             </a:r>
-            <a:pPr algn="l" indent="0" marL="0">
-              <a:buNone/>
-            </a:pPr>
             <a:r>
               <a:rPr lang="en-US" sz="1300" b="1" dirty="0">
                 <a:solidFill>
@@ -2764,9 +2761,6 @@
               </a:rPr>
               <a:t>不</a:t>
             </a:r>
-            <a:pPr algn="l" indent="0" marL="0">
-              <a:buNone/>
-            </a:pPr>
             <a:r>
               <a:rPr lang="en-US" sz="1300" dirty="0">
                 <a:solidFill>
@@ -2964,9 +2958,6 @@
               </a:rPr>
               <a:t>Correct </a:t>
             </a:r>
-            <a:pPr algn="l" indent="0" marL="0">
-              <a:buNone/>
-            </a:pPr>
             <a:r>
               <a:rPr lang="en-US" sz="1300" b="1" dirty="0">
                 <a:solidFill>
@@ -2978,9 +2969,6 @@
               </a:rPr>
               <a:t>radicals</a:t>
             </a:r>
-            <a:pPr algn="l" indent="0" marL="0">
-              <a:buNone/>
-            </a:pPr>
             <a:r>
               <a:rPr lang="en-US" sz="1300" dirty="0">
                 <a:solidFill>
@@ -4486,9 +4474,6 @@
               </a:rPr>
               <a:t>Teacher gives </a:t>
             </a:r>
-            <a:pPr algn="l" indent="0" marL="0">
-              <a:buNone/>
-            </a:pPr>
             <a:r>
               <a:rPr lang="en-US" sz="950" b="1" dirty="0">
                 <a:solidFill>
@@ -4500,9 +4485,6 @@
               </a:rPr>
               <a:t>English</a:t>
             </a:r>
-            <a:pPr algn="l" indent="0" marL="0">
-              <a:buNone/>
-            </a:pPr>
             <a:r>
               <a:rPr lang="en-US" sz="950" dirty="0">
                 <a:solidFill>
@@ -4624,9 +4606,6 @@
               </a:rPr>
               <a:t>Quickfire pace — hold up </a:t>
             </a:r>
-            <a:pPr algn="l" indent="0" marL="0">
-              <a:buNone/>
-            </a:pPr>
             <a:r>
               <a:rPr lang="en-US" sz="950" b="1" dirty="0">
                 <a:solidFill>
@@ -4638,9 +4617,6 @@
               </a:rPr>
               <a:t>immediately</a:t>
             </a:r>
-            <a:pPr algn="l" indent="0" marL="0">
-              <a:buNone/>
-            </a:pPr>
             <a:r>
               <a:rPr lang="en-US" sz="950" dirty="0">
                 <a:solidFill>
@@ -4762,9 +4738,6 @@
               </a:rPr>
               <a:t>Extension: fluent students also sort each word into a category — </a:t>
             </a:r>
-            <a:pPr algn="l" indent="0" marL="0">
-              <a:buNone/>
-            </a:pPr>
             <a:r>
               <a:rPr lang="en-US" sz="950" b="1" dirty="0">
                 <a:solidFill>
@@ -4776,9 +4749,6 @@
               </a:rPr>
               <a:t>transport / routine / time</a:t>
             </a:r>
-            <a:pPr algn="l" indent="0" marL="0">
-              <a:buNone/>
-            </a:pPr>
             <a:r>
               <a:rPr lang="en-US" sz="950" dirty="0">
                 <a:solidFill>
@@ -4900,9 +4870,6 @@
               </a:rPr>
               <a:t>Setup: projector showing the vocabulary list — </a:t>
             </a:r>
-            <a:pPr algn="l" indent="0" marL="0">
-              <a:buNone/>
-            </a:pPr>
             <a:r>
               <a:rPr lang="en-US" sz="950" b="1" dirty="0">
                 <a:solidFill>
@@ -4914,9 +4881,6 @@
               </a:rPr>
               <a:t>no devices</a:t>
             </a:r>
-            <a:pPr algn="l" indent="0" marL="0">
-              <a:buNone/>
-            </a:pPr>
             <a:r>
               <a:rPr lang="en-US" sz="950" dirty="0">
                 <a:solidFill>
@@ -5632,12 +5596,6 @@
               </a:rPr>
               <a:t>On your own paragraph, highlight: </a:t>
             </a:r>
-            <a:pPr algn="l" indent="0" marL="0">
-              <a:lnSpc>
-                <a:spcPts val="1540"/>
-              </a:lnSpc>
-              <a:buNone/>
-            </a:pPr>
             <a:r>
               <a:rPr lang="en-US" sz="1100" b="1" dirty="0">
                 <a:solidFill>
@@ -5649,12 +5607,6 @@
               </a:rPr>
               <a:t>one sentence you're proud of</a:t>
             </a:r>
-            <a:pPr algn="l" indent="0" marL="0">
-              <a:lnSpc>
-                <a:spcPts val="1540"/>
-              </a:lnSpc>
-              <a:buNone/>
-            </a:pPr>
             <a:r>
               <a:rPr lang="en-US" sz="1100" dirty="0">
                 <a:solidFill>
@@ -5666,12 +5618,6 @@
               </a:rPr>
               <a:t>, and </a:t>
             </a:r>
-            <a:pPr algn="l" indent="0" marL="0">
-              <a:lnSpc>
-                <a:spcPts val="1540"/>
-              </a:lnSpc>
-              <a:buNone/>
-            </a:pPr>
             <a:r>
               <a:rPr lang="en-US" sz="1100" b="1" dirty="0">
                 <a:solidFill>
@@ -5683,12 +5629,6 @@
               </a:rPr>
               <a:t>one you're unsure about</a:t>
             </a:r>
-            <a:pPr algn="l" indent="0" marL="0">
-              <a:lnSpc>
-                <a:spcPts val="1540"/>
-              </a:lnSpc>
-              <a:buNone/>
-            </a:pPr>
             <a:r>
               <a:rPr lang="en-US" sz="1100" dirty="0">
                 <a:solidFill>
@@ -6196,15 +6136,6 @@
               </a:rPr>
               <a:t>You wrote a full paragraph combining time, daily routine, and transport — </a:t>
             </a:r>
-            <a:pPr algn="ctr" indent="0" marL="0">
-              <a:lnSpc>
-                <a:spcPts val="1875"/>
-              </a:lnSpc>
-              <a:spcAft>
-                <a:spcPts val="1000"/>
-              </a:spcAft>
-              <a:buNone/>
-            </a:pPr>
             <a:r>
               <a:rPr lang="en-US" sz="1250" b="1" dirty="0">
                 <a:solidFill>
@@ -6423,18 +6354,6 @@
               </a:rPr>
               <a:t>Today: </a:t>
             </a:r>
-            <a:pPr algn="ctr" indent="0" marL="0">
-              <a:lnSpc>
-                <a:spcPts val="1725"/>
-              </a:lnSpc>
-              <a:spcBef>
-                <a:spcPts val="1000"/>
-              </a:spcBef>
-              <a:spcAft>
-                <a:spcPts val="1150"/>
-              </a:spcAft>
-              <a:buNone/>
-            </a:pPr>
             <a:r>
               <a:rPr lang="en-US" sz="1150" b="1" dirty="0">
                 <a:solidFill>
@@ -6446,18 +6365,6 @@
               </a:rPr>
               <a:t>cumulative paragraph writing</a:t>
             </a:r>
-            <a:pPr algn="ctr" indent="0" marL="0">
-              <a:lnSpc>
-                <a:spcPts val="1725"/>
-              </a:lnSpc>
-              <a:spcBef>
-                <a:spcPts val="1000"/>
-              </a:spcBef>
-              <a:spcAft>
-                <a:spcPts val="1150"/>
-              </a:spcAft>
-              <a:buNone/>
-            </a:pPr>
             <a:r>
               <a:rPr lang="en-US" sz="1150" dirty="0">
                 <a:solidFill>
@@ -9906,12 +9813,6 @@
               </a:rPr>
               <a:t>We are learning to write a full paragraph describing someone's </a:t>
             </a:r>
-            <a:pPr algn="l" indent="0" marL="0">
-              <a:lnSpc>
-                <a:spcPts val="2100"/>
-              </a:lnSpc>
-              <a:buNone/>
-            </a:pPr>
             <a:r>
               <a:rPr lang="en-US" sz="1500" b="1" dirty="0">
                 <a:solidFill>
@@ -9923,12 +9824,6 @@
               </a:rPr>
               <a:t>daily routine, including time and transport</a:t>
             </a:r>
-            <a:pPr algn="l" indent="0" marL="0">
-              <a:lnSpc>
-                <a:spcPts val="2100"/>
-              </a:lnSpc>
-              <a:buNone/>
-            </a:pPr>
             <a:r>
               <a:rPr lang="en-US" sz="1500" dirty="0">
                 <a:solidFill>
@@ -10052,9 +9947,6 @@
               </a:rPr>
               <a:t>I can write at least </a:t>
             </a:r>
-            <a:pPr algn="l" indent="0" marL="0">
-              <a:buNone/>
-            </a:pPr>
             <a:r>
               <a:rPr lang="en-US" sz="1300" b="1" dirty="0">
                 <a:solidFill>
@@ -10066,9 +9958,6 @@
               </a:rPr>
               <a:t>4 connected sentences</a:t>
             </a:r>
-            <a:pPr algn="l" indent="0" marL="0">
-              <a:buNone/>
-            </a:pPr>
             <a:r>
               <a:rPr lang="en-US" sz="1300" dirty="0">
                 <a:solidFill>
@@ -10234,9 +10123,6 @@
               </a:rPr>
               <a:t>I can correctly </a:t>
             </a:r>
-            <a:pPr algn="l" indent="0" marL="0">
-              <a:buNone/>
-            </a:pPr>
             <a:r>
               <a:rPr lang="en-US" sz="1300" b="1" dirty="0">
                 <a:solidFill>
@@ -10248,9 +10134,6 @@
               </a:rPr>
               <a:t>sequence time, transport, and routine verbs</a:t>
             </a:r>
-            <a:pPr algn="l" indent="0" marL="0">
-              <a:buNone/>
-            </a:pPr>
             <a:r>
               <a:rPr lang="en-US" sz="1300" dirty="0">
                 <a:solidFill>
@@ -10416,9 +10299,6 @@
               </a:rPr>
               <a:t>I can review and </a:t>
             </a:r>
-            <a:pPr algn="l" indent="0" marL="0">
-              <a:buNone/>
-            </a:pPr>
             <a:r>
               <a:rPr lang="en-US" sz="1300" b="1" dirty="0">
                 <a:solidFill>
@@ -10430,9 +10310,6 @@
               </a:rPr>
               <a:t>self-correct</a:t>
             </a:r>
-            <a:pPr algn="l" indent="0" marL="0">
-              <a:buNone/>
-            </a:pPr>
             <a:r>
               <a:rPr lang="en-US" sz="1300" dirty="0">
                 <a:solidFill>
@@ -17616,9 +17493,6 @@
               </a:rPr>
               <a:t>起居动词 </a:t>
             </a:r>
-            <a:pPr algn="l" indent="0" marL="0">
-              <a:buNone/>
-            </a:pPr>
             <a:r>
               <a:rPr lang="en-US" sz="1200" dirty="0">
                 <a:solidFill>
@@ -17630,9 +17504,6 @@
               </a:rPr>
               <a:t>→</a:t>
             </a:r>
-            <a:pPr algn="l" indent="0" marL="0">
-              <a:buNone/>
-            </a:pPr>
             <a:r>
               <a:rPr lang="en-US" sz="1200" dirty="0">
                 <a:solidFill>
@@ -17644,9 +17515,6 @@
               </a:rPr>
               <a:t> 时间 </a:t>
             </a:r>
-            <a:pPr algn="l" indent="0" marL="0">
-              <a:buNone/>
-            </a:pPr>
             <a:r>
               <a:rPr lang="en-US" sz="1200" dirty="0">
                 <a:solidFill>
@@ -17658,9 +17526,6 @@
               </a:rPr>
               <a:t>→</a:t>
             </a:r>
-            <a:pPr algn="l" indent="0" marL="0">
-              <a:buNone/>
-            </a:pPr>
             <a:r>
               <a:rPr lang="en-US" sz="1200" dirty="0">
                 <a:solidFill>
@@ -17672,9 +17537,6 @@
               </a:rPr>
               <a:t> 交通工具 </a:t>
             </a:r>
-            <a:pPr algn="l" indent="0" marL="0">
-              <a:buNone/>
-            </a:pPr>
             <a:r>
               <a:rPr lang="en-US" sz="1200" dirty="0">
                 <a:solidFill>
@@ -17686,9 +17548,6 @@
               </a:rPr>
               <a:t>→</a:t>
             </a:r>
-            <a:pPr algn="l" indent="0" marL="0">
-              <a:buNone/>
-            </a:pPr>
             <a:r>
               <a:rPr lang="en-US" sz="1200" dirty="0">
                 <a:solidFill>
@@ -18182,9 +18041,6 @@
               </a:rPr>
               <a:t>What are the </a:t>
             </a:r>
-            <a:pPr algn="l" indent="0" marL="0">
-              <a:buNone/>
-            </a:pPr>
             <a:r>
               <a:rPr lang="en-US" sz="1300" b="1" dirty="0">
                 <a:solidFill>
@@ -18196,9 +18052,6 @@
               </a:rPr>
               <a:t>3 ingredients</a:t>
             </a:r>
-            <a:pPr algn="l" indent="0" marL="0">
-              <a:buNone/>
-            </a:pPr>
             <a:r>
               <a:rPr lang="en-US" sz="1300" dirty="0">
                 <a:solidFill>
@@ -18391,9 +18244,6 @@
               </a:rPr>
               <a:t>Translate: </a:t>
             </a:r>
-            <a:pPr algn="l" indent="0" marL="0">
-              <a:buNone/>
-            </a:pPr>
             <a:r>
               <a:rPr lang="en-US" sz="1300" b="1" dirty="0">
                 <a:solidFill>
@@ -18586,9 +18436,6 @@
               </a:rPr>
               <a:t>Fix the word order: </a:t>
             </a:r>
-            <a:pPr algn="l" indent="0" marL="0">
-              <a:buNone/>
-            </a:pPr>
             <a:r>
               <a:rPr lang="en-US" sz="1300" b="1" dirty="0">
                 <a:solidFill>
@@ -19599,9 +19446,6 @@
               </a:rPr>
               <a:t>Q3 —</a:t>
             </a:r>
-            <a:pPr algn="l" indent="0" marL="0">
-              <a:buNone/>
-            </a:pPr>
             <a:r>
               <a:rPr lang="en-US" sz="1050" dirty="0">
                 <a:solidFill>
@@ -20169,9 +20013,6 @@
               </a:rPr>
               <a:t>我</a:t>
             </a:r>
-            <a:pPr algn="l" indent="0" marL="0">
-              <a:buNone/>
-            </a:pPr>
             <a:r>
               <a:rPr lang="en-US" sz="1400" b="1" dirty="0">
                 <a:solidFill>
@@ -20183,9 +20024,6 @@
               </a:rPr>
               <a:t>___</a:t>
             </a:r>
-            <a:pPr algn="l" indent="0" marL="0">
-              <a:buNone/>
-            </a:pPr>
             <a:r>
               <a:rPr lang="en-US" sz="1400" dirty="0">
                 <a:solidFill>
@@ -20378,9 +20216,6 @@
               </a:rPr>
               <a:t>我</a:t>
             </a:r>
-            <a:pPr algn="l" indent="0" marL="0">
-              <a:buNone/>
-            </a:pPr>
             <a:r>
               <a:rPr lang="en-US" sz="1400" b="1" dirty="0">
                 <a:solidFill>
@@ -20392,9 +20227,6 @@
               </a:rPr>
               <a:t>___</a:t>
             </a:r>
-            <a:pPr algn="l" indent="0" marL="0">
-              <a:buNone/>
-            </a:pPr>
             <a:r>
               <a:rPr lang="en-US" sz="1400" dirty="0">
                 <a:solidFill>
@@ -20587,9 +20419,6 @@
               </a:rPr>
               <a:t>我每天</a:t>
             </a:r>
-            <a:pPr algn="l" indent="0" marL="0">
-              <a:buNone/>
-            </a:pPr>
             <a:r>
               <a:rPr lang="en-US" sz="1400" b="1" dirty="0">
                 <a:solidFill>
@@ -20601,9 +20430,6 @@
               </a:rPr>
               <a:t>___</a:t>
             </a:r>
-            <a:pPr algn="l" indent="0" marL="0">
-              <a:buNone/>
-            </a:pPr>
             <a:r>
               <a:rPr lang="en-US" sz="1400" dirty="0">
                 <a:solidFill>
@@ -20796,9 +20622,6 @@
               </a:rPr>
               <a:t>我们</a:t>
             </a:r>
-            <a:pPr algn="l" indent="0" marL="0">
-              <a:buNone/>
-            </a:pPr>
             <a:r>
               <a:rPr lang="en-US" sz="1400" b="1" dirty="0">
                 <a:solidFill>
@@ -20810,9 +20633,6 @@
               </a:rPr>
               <a:t>___</a:t>
             </a:r>
-            <a:pPr algn="l" indent="0" marL="0">
-              <a:buNone/>
-            </a:pPr>
             <a:r>
               <a:rPr lang="en-US" sz="1400" dirty="0">
                 <a:solidFill>
@@ -20824,9 +20644,6 @@
               </a:rPr>
               <a:t>上课，</a:t>
             </a:r>
-            <a:pPr algn="l" indent="0" marL="0">
-              <a:buNone/>
-            </a:pPr>
             <a:r>
               <a:rPr lang="en-US" sz="1400" b="1" dirty="0">
                 <a:solidFill>
@@ -20838,9 +20655,6 @@
               </a:rPr>
               <a:t>___</a:t>
             </a:r>
-            <a:pPr algn="l" indent="0" marL="0">
-              <a:buNone/>
-            </a:pPr>
             <a:r>
               <a:rPr lang="en-US" sz="1400" dirty="0">
                 <a:solidFill>
@@ -21033,9 +20847,6 @@
               </a:rPr>
               <a:t>我</a:t>
             </a:r>
-            <a:pPr algn="l" indent="0" marL="0">
-              <a:buNone/>
-            </a:pPr>
             <a:r>
               <a:rPr lang="en-US" sz="1400" b="1" dirty="0">
                 <a:solidFill>
@@ -21047,9 +20858,6 @@
               </a:rPr>
               <a:t>___</a:t>
             </a:r>
-            <a:pPr algn="l" indent="0" marL="0">
-              <a:buNone/>
-            </a:pPr>
             <a:r>
               <a:rPr lang="en-US" sz="1400" dirty="0">
                 <a:solidFill>
